--- a/submission/GCB/figures_SI/FigS18.pptx
+++ b/submission/GCB/figures_SI/FigS18.pptx
@@ -478,8 +478,8 @@
         </p:nvSpPr>
         <p:spPr>
           <a:xfrm>
-            <a:off x="940680" y="1873800"/>
-            <a:ext cx="409320" cy="1265040"/>
+            <a:off x="940680" y="1776960"/>
+            <a:ext cx="409320" cy="1361880"/>
           </a:xfrm>
           <a:custGeom>
             <a:avLst/>
@@ -487,7 +487,7 @@
             <a:ahLst/>
             <a:rect l="0" t="0" r="r" b="b"/>
             <a:pathLst>
-              <a:path w="1137" h="3514">
+              <a:path w="1137" h="3783">
                 <a:moveTo>
                   <a:pt x="0" y="0"/>
                 </a:moveTo>
@@ -495,10 +495,10 @@
                   <a:pt x="1137" y="0"/>
                 </a:lnTo>
                 <a:lnTo>
-                  <a:pt x="1137" y="3514"/>
-                </a:lnTo>
-                <a:lnTo>
-                  <a:pt x="0" y="3514"/>
+                  <a:pt x="1137" y="3783"/>
+                </a:lnTo>
+                <a:lnTo>
+                  <a:pt x="0" y="3783"/>
                 </a:lnTo>
                 <a:lnTo>
                   <a:pt x="0" y="0"/>
@@ -538,8 +538,8 @@
         </p:nvSpPr>
         <p:spPr>
           <a:xfrm>
-            <a:off x="2693880" y="2516400"/>
-            <a:ext cx="409320" cy="622440"/>
+            <a:off x="2693880" y="2435760"/>
+            <a:ext cx="409320" cy="703080"/>
           </a:xfrm>
           <a:custGeom>
             <a:avLst/>
@@ -547,7 +547,7 @@
             <a:ahLst/>
             <a:rect l="0" t="0" r="r" b="b"/>
             <a:pathLst>
-              <a:path w="1137" h="1729">
+              <a:path w="1137" h="1953">
                 <a:moveTo>
                   <a:pt x="0" y="0"/>
                 </a:moveTo>
@@ -555,10 +555,10 @@
                   <a:pt x="1137" y="0"/>
                 </a:lnTo>
                 <a:lnTo>
-                  <a:pt x="1137" y="1729"/>
-                </a:lnTo>
-                <a:lnTo>
-                  <a:pt x="0" y="1729"/>
+                  <a:pt x="1137" y="1953"/>
+                </a:lnTo>
+                <a:lnTo>
+                  <a:pt x="0" y="1953"/>
                 </a:lnTo>
                 <a:lnTo>
                   <a:pt x="0" y="0"/>
@@ -598,8 +598,8 @@
         </p:nvSpPr>
         <p:spPr>
           <a:xfrm>
-            <a:off x="4447080" y="2494440"/>
-            <a:ext cx="409320" cy="644400"/>
+            <a:off x="4447080" y="2453400"/>
+            <a:ext cx="409320" cy="685440"/>
           </a:xfrm>
           <a:custGeom>
             <a:avLst/>
@@ -607,7 +607,7 @@
             <a:ahLst/>
             <a:rect l="0" t="0" r="r" b="b"/>
             <a:pathLst>
-              <a:path w="1137" h="1790">
+              <a:path w="1137" h="1904">
                 <a:moveTo>
                   <a:pt x="0" y="0"/>
                 </a:moveTo>
@@ -615,10 +615,10 @@
                   <a:pt x="1137" y="0"/>
                 </a:lnTo>
                 <a:lnTo>
-                  <a:pt x="1137" y="1790"/>
-                </a:lnTo>
-                <a:lnTo>
-                  <a:pt x="0" y="1790"/>
+                  <a:pt x="1137" y="1904"/>
+                </a:lnTo>
+                <a:lnTo>
+                  <a:pt x="0" y="1904"/>
                 </a:lnTo>
                 <a:lnTo>
                   <a:pt x="0" y="0"/>
@@ -658,8 +658,8 @@
         </p:nvSpPr>
         <p:spPr>
           <a:xfrm>
-            <a:off x="6199920" y="2005920"/>
-            <a:ext cx="409680" cy="1132920"/>
+            <a:off x="6199920" y="1989360"/>
+            <a:ext cx="409680" cy="1149480"/>
           </a:xfrm>
           <a:custGeom>
             <a:avLst/>
@@ -667,7 +667,7 @@
             <a:ahLst/>
             <a:rect l="0" t="0" r="r" b="b"/>
             <a:pathLst>
-              <a:path w="1138" h="3147">
+              <a:path w="1138" h="3193">
                 <a:moveTo>
                   <a:pt x="0" y="0"/>
                 </a:moveTo>
@@ -675,10 +675,10 @@
                   <a:pt x="1138" y="0"/>
                 </a:lnTo>
                 <a:lnTo>
-                  <a:pt x="1138" y="3147"/>
-                </a:lnTo>
-                <a:lnTo>
-                  <a:pt x="0" y="3147"/>
+                  <a:pt x="1138" y="3193"/>
+                </a:lnTo>
+                <a:lnTo>
+                  <a:pt x="0" y="3193"/>
                 </a:lnTo>
                 <a:lnTo>
                   <a:pt x="0" y="0"/>
@@ -718,8 +718,8 @@
         </p:nvSpPr>
         <p:spPr>
           <a:xfrm>
-            <a:off x="1396440" y="1560600"/>
-            <a:ext cx="409320" cy="1578240"/>
+            <a:off x="1396440" y="1479240"/>
+            <a:ext cx="409320" cy="1659600"/>
           </a:xfrm>
           <a:custGeom>
             <a:avLst/>
@@ -727,7 +727,7 @@
             <a:ahLst/>
             <a:rect l="0" t="0" r="r" b="b"/>
             <a:pathLst>
-              <a:path w="1137" h="4384">
+              <a:path w="1137" h="4610">
                 <a:moveTo>
                   <a:pt x="0" y="0"/>
                 </a:moveTo>
@@ -735,10 +735,10 @@
                   <a:pt x="1137" y="0"/>
                 </a:lnTo>
                 <a:lnTo>
-                  <a:pt x="1137" y="4384"/>
-                </a:lnTo>
-                <a:lnTo>
-                  <a:pt x="0" y="4384"/>
+                  <a:pt x="1137" y="4610"/>
+                </a:lnTo>
+                <a:lnTo>
+                  <a:pt x="0" y="4610"/>
                 </a:lnTo>
                 <a:lnTo>
                   <a:pt x="0" y="0"/>
@@ -778,8 +778,8 @@
         </p:nvSpPr>
         <p:spPr>
           <a:xfrm>
-            <a:off x="3149640" y="1747800"/>
-            <a:ext cx="409320" cy="1391040"/>
+            <a:off x="3149640" y="1803960"/>
+            <a:ext cx="409320" cy="1334880"/>
           </a:xfrm>
           <a:custGeom>
             <a:avLst/>
@@ -787,7 +787,7 @@
             <a:ahLst/>
             <a:rect l="0" t="0" r="r" b="b"/>
             <a:pathLst>
-              <a:path w="1137" h="3864">
+              <a:path w="1137" h="3708">
                 <a:moveTo>
                   <a:pt x="0" y="0"/>
                 </a:moveTo>
@@ -795,10 +795,10 @@
                   <a:pt x="1137" y="0"/>
                 </a:lnTo>
                 <a:lnTo>
-                  <a:pt x="1137" y="3864"/>
-                </a:lnTo>
-                <a:lnTo>
-                  <a:pt x="0" y="3864"/>
+                  <a:pt x="1137" y="3708"/>
+                </a:lnTo>
+                <a:lnTo>
+                  <a:pt x="0" y="3708"/>
                 </a:lnTo>
                 <a:lnTo>
                   <a:pt x="0" y="0"/>
@@ -838,8 +838,8 @@
         </p:nvSpPr>
         <p:spPr>
           <a:xfrm>
-            <a:off x="4902840" y="2530440"/>
-            <a:ext cx="409320" cy="608400"/>
+            <a:off x="4902840" y="2455560"/>
+            <a:ext cx="409320" cy="683280"/>
           </a:xfrm>
           <a:custGeom>
             <a:avLst/>
@@ -847,7 +847,7 @@
             <a:ahLst/>
             <a:rect l="0" t="0" r="r" b="b"/>
             <a:pathLst>
-              <a:path w="1137" h="1690">
+              <a:path w="1137" h="1898">
                 <a:moveTo>
                   <a:pt x="0" y="0"/>
                 </a:moveTo>
@@ -855,10 +855,10 @@
                   <a:pt x="1137" y="0"/>
                 </a:lnTo>
                 <a:lnTo>
-                  <a:pt x="1137" y="1690"/>
-                </a:lnTo>
-                <a:lnTo>
-                  <a:pt x="0" y="1690"/>
+                  <a:pt x="1137" y="1898"/>
+                </a:lnTo>
+                <a:lnTo>
+                  <a:pt x="0" y="1898"/>
                 </a:lnTo>
                 <a:lnTo>
                   <a:pt x="0" y="0"/>
@@ -898,8 +898,8 @@
         </p:nvSpPr>
         <p:spPr>
           <a:xfrm>
-            <a:off x="6656040" y="2362320"/>
-            <a:ext cx="409320" cy="776520"/>
+            <a:off x="6656040" y="2350440"/>
+            <a:ext cx="409320" cy="788400"/>
           </a:xfrm>
           <a:custGeom>
             <a:avLst/>
@@ -907,7 +907,7 @@
             <a:ahLst/>
             <a:rect l="0" t="0" r="r" b="b"/>
             <a:pathLst>
-              <a:path w="1137" h="2157">
+              <a:path w="1137" h="2190">
                 <a:moveTo>
                   <a:pt x="0" y="0"/>
                 </a:moveTo>
@@ -915,10 +915,10 @@
                   <a:pt x="1137" y="0"/>
                 </a:lnTo>
                 <a:lnTo>
-                  <a:pt x="1137" y="2157"/>
-                </a:lnTo>
-                <a:lnTo>
-                  <a:pt x="0" y="2157"/>
+                  <a:pt x="1137" y="2190"/>
+                </a:lnTo>
+                <a:lnTo>
+                  <a:pt x="0" y="2190"/>
                 </a:lnTo>
                 <a:lnTo>
                   <a:pt x="0" y="0"/>
@@ -958,8 +958,8 @@
         </p:nvSpPr>
         <p:spPr>
           <a:xfrm>
-            <a:off x="1852200" y="2019960"/>
-            <a:ext cx="409320" cy="1118880"/>
+            <a:off x="1852200" y="1823760"/>
+            <a:ext cx="409320" cy="1315080"/>
           </a:xfrm>
           <a:custGeom>
             <a:avLst/>
@@ -967,7 +967,7 @@
             <a:ahLst/>
             <a:rect l="0" t="0" r="r" b="b"/>
             <a:pathLst>
-              <a:path w="1137" h="3108">
+              <a:path w="1137" h="3653">
                 <a:moveTo>
                   <a:pt x="0" y="0"/>
                 </a:moveTo>
@@ -975,10 +975,10 @@
                   <a:pt x="1137" y="0"/>
                 </a:lnTo>
                 <a:lnTo>
-                  <a:pt x="1137" y="3108"/>
-                </a:lnTo>
-                <a:lnTo>
-                  <a:pt x="0" y="3108"/>
+                  <a:pt x="1137" y="3653"/>
+                </a:lnTo>
+                <a:lnTo>
+                  <a:pt x="0" y="3653"/>
                 </a:lnTo>
                 <a:lnTo>
                   <a:pt x="0" y="0"/>
@@ -1018,8 +1018,8 @@
         </p:nvSpPr>
         <p:spPr>
           <a:xfrm>
-            <a:off x="3605400" y="1775520"/>
-            <a:ext cx="409320" cy="1363320"/>
+            <a:off x="3605400" y="1926000"/>
+            <a:ext cx="409320" cy="1212840"/>
           </a:xfrm>
           <a:custGeom>
             <a:avLst/>
@@ -1027,7 +1027,7 @@
             <a:ahLst/>
             <a:rect l="0" t="0" r="r" b="b"/>
             <a:pathLst>
-              <a:path w="1137" h="3787">
+              <a:path w="1137" h="3369">
                 <a:moveTo>
                   <a:pt x="0" y="0"/>
                 </a:moveTo>
@@ -1035,10 +1035,10 @@
                   <a:pt x="1137" y="0"/>
                 </a:lnTo>
                 <a:lnTo>
-                  <a:pt x="1137" y="3787"/>
-                </a:lnTo>
-                <a:lnTo>
-                  <a:pt x="0" y="3787"/>
+                  <a:pt x="1137" y="3369"/>
+                </a:lnTo>
+                <a:lnTo>
+                  <a:pt x="0" y="3369"/>
                 </a:lnTo>
                 <a:lnTo>
                   <a:pt x="0" y="0"/>
@@ -1078,8 +1078,8 @@
         </p:nvSpPr>
         <p:spPr>
           <a:xfrm>
-            <a:off x="5358600" y="2471400"/>
-            <a:ext cx="409320" cy="667440"/>
+            <a:off x="5358600" y="2516400"/>
+            <a:ext cx="409320" cy="622440"/>
           </a:xfrm>
           <a:custGeom>
             <a:avLst/>
@@ -1087,7 +1087,7 @@
             <a:ahLst/>
             <a:rect l="0" t="0" r="r" b="b"/>
             <a:pathLst>
-              <a:path w="1137" h="1854">
+              <a:path w="1137" h="1729">
                 <a:moveTo>
                   <a:pt x="0" y="0"/>
                 </a:moveTo>
@@ -1095,10 +1095,10 @@
                   <a:pt x="1137" y="0"/>
                 </a:lnTo>
                 <a:lnTo>
-                  <a:pt x="1137" y="1854"/>
-                </a:lnTo>
-                <a:lnTo>
-                  <a:pt x="0" y="1854"/>
+                  <a:pt x="1137" y="1729"/>
+                </a:lnTo>
+                <a:lnTo>
+                  <a:pt x="0" y="1729"/>
                 </a:lnTo>
                 <a:lnTo>
                   <a:pt x="0" y="0"/>
@@ -1138,8 +1138,8 @@
         </p:nvSpPr>
         <p:spPr>
           <a:xfrm>
-            <a:off x="7111800" y="2303280"/>
-            <a:ext cx="409320" cy="835560"/>
+            <a:off x="7111800" y="2313000"/>
+            <a:ext cx="409320" cy="825840"/>
           </a:xfrm>
           <a:custGeom>
             <a:avLst/>
@@ -1147,7 +1147,7 @@
             <a:ahLst/>
             <a:rect l="0" t="0" r="r" b="b"/>
             <a:pathLst>
-              <a:path w="1137" h="2321">
+              <a:path w="1137" h="2294">
                 <a:moveTo>
                   <a:pt x="0" y="0"/>
                 </a:moveTo>
@@ -1155,10 +1155,10 @@
                   <a:pt x="1137" y="0"/>
                 </a:lnTo>
                 <a:lnTo>
-                  <a:pt x="1137" y="2321"/>
-                </a:lnTo>
-                <a:lnTo>
-                  <a:pt x="0" y="2321"/>
+                  <a:pt x="1137" y="2294"/>
+                </a:lnTo>
+                <a:lnTo>
+                  <a:pt x="0" y="2294"/>
                 </a:lnTo>
                 <a:lnTo>
                   <a:pt x="0" y="0"/>
@@ -1198,7 +1198,7 @@
         </p:nvSpPr>
         <p:spPr>
           <a:xfrm>
-            <a:off x="1092600" y="1467720"/>
+            <a:off x="1092600" y="1324440"/>
             <a:ext cx="105120" cy="0"/>
           </a:xfrm>
           <a:prstGeom prst="line">
@@ -1241,8 +1241,8 @@
         </p:nvSpPr>
         <p:spPr>
           <a:xfrm>
-            <a:off x="1145160" y="1467720"/>
-            <a:ext cx="0" cy="812160"/>
+            <a:off x="1145160" y="1324440"/>
+            <a:ext cx="0" cy="905040"/>
           </a:xfrm>
           <a:prstGeom prst="line">
             <a:avLst/>
@@ -1284,7 +1284,7 @@
         </p:nvSpPr>
         <p:spPr>
           <a:xfrm>
-            <a:off x="1092600" y="2279880"/>
+            <a:off x="1092600" y="2229480"/>
             <a:ext cx="105120" cy="0"/>
           </a:xfrm>
           <a:prstGeom prst="line">
@@ -1327,7 +1327,7 @@
         </p:nvSpPr>
         <p:spPr>
           <a:xfrm>
-            <a:off x="2845800" y="2425320"/>
+            <a:off x="2845800" y="2232360"/>
             <a:ext cx="105120" cy="0"/>
           </a:xfrm>
           <a:prstGeom prst="line">
@@ -1370,8 +1370,8 @@
         </p:nvSpPr>
         <p:spPr>
           <a:xfrm>
-            <a:off x="2898360" y="2425320"/>
-            <a:ext cx="0" cy="181800"/>
+            <a:off x="2898360" y="2232360"/>
+            <a:ext cx="0" cy="406800"/>
           </a:xfrm>
           <a:prstGeom prst="line">
             <a:avLst/>
@@ -1413,7 +1413,7 @@
         </p:nvSpPr>
         <p:spPr>
           <a:xfrm>
-            <a:off x="2845800" y="2607120"/>
+            <a:off x="2845800" y="2639160"/>
             <a:ext cx="105120" cy="0"/>
           </a:xfrm>
           <a:prstGeom prst="line">
@@ -1456,7 +1456,7 @@
         </p:nvSpPr>
         <p:spPr>
           <a:xfrm>
-            <a:off x="4599000" y="2248560"/>
+            <a:off x="4599000" y="2145960"/>
             <a:ext cx="105120" cy="0"/>
           </a:xfrm>
           <a:prstGeom prst="line">
@@ -1499,8 +1499,8 @@
         </p:nvSpPr>
         <p:spPr>
           <a:xfrm>
-            <a:off x="4651560" y="2248560"/>
-            <a:ext cx="0" cy="492120"/>
+            <a:off x="4651560" y="2145960"/>
+            <a:ext cx="0" cy="615240"/>
           </a:xfrm>
           <a:prstGeom prst="line">
             <a:avLst/>
@@ -1542,7 +1542,7 @@
         </p:nvSpPr>
         <p:spPr>
           <a:xfrm>
-            <a:off x="4599000" y="2740680"/>
+            <a:off x="4599000" y="2761200"/>
             <a:ext cx="105120" cy="0"/>
           </a:xfrm>
           <a:prstGeom prst="line">
@@ -1629,7 +1629,7 @@
         <p:spPr>
           <a:xfrm>
             <a:off x="1600920" y="800280"/>
-            <a:ext cx="0" cy="1520640"/>
+            <a:ext cx="0" cy="1357920"/>
           </a:xfrm>
           <a:prstGeom prst="line">
             <a:avLst/>
@@ -1671,7 +1671,7 @@
         </p:nvSpPr>
         <p:spPr>
           <a:xfrm>
-            <a:off x="1548360" y="2320920"/>
+            <a:off x="1548360" y="2158200"/>
             <a:ext cx="105120" cy="0"/>
           </a:xfrm>
           <a:prstGeom prst="line">
@@ -1714,7 +1714,7 @@
         </p:nvSpPr>
         <p:spPr>
           <a:xfrm>
-            <a:off x="3301560" y="1230120"/>
+            <a:off x="3301560" y="1526040"/>
             <a:ext cx="105120" cy="0"/>
           </a:xfrm>
           <a:prstGeom prst="line">
@@ -1757,8 +1757,8 @@
         </p:nvSpPr>
         <p:spPr>
           <a:xfrm>
-            <a:off x="3354120" y="1230120"/>
-            <a:ext cx="0" cy="1035000"/>
+            <a:off x="3354120" y="1526040"/>
+            <a:ext cx="0" cy="555840"/>
           </a:xfrm>
           <a:prstGeom prst="line">
             <a:avLst/>
@@ -1800,7 +1800,7 @@
         </p:nvSpPr>
         <p:spPr>
           <a:xfrm>
-            <a:off x="3301560" y="2265120"/>
+            <a:off x="3301560" y="2081880"/>
             <a:ext cx="105120" cy="0"/>
           </a:xfrm>
           <a:prstGeom prst="line">
@@ -1843,7 +1843,7 @@
         </p:nvSpPr>
         <p:spPr>
           <a:xfrm>
-            <a:off x="5054760" y="2304000"/>
+            <a:off x="5054760" y="2309760"/>
             <a:ext cx="105120" cy="0"/>
           </a:xfrm>
           <a:prstGeom prst="line">
@@ -1886,8 +1886,8 @@
         </p:nvSpPr>
         <p:spPr>
           <a:xfrm>
-            <a:off x="5107320" y="2304000"/>
-            <a:ext cx="0" cy="452880"/>
+            <a:off x="5107320" y="2309760"/>
+            <a:ext cx="0" cy="291960"/>
           </a:xfrm>
           <a:prstGeom prst="line">
             <a:avLst/>
@@ -1929,7 +1929,7 @@
         </p:nvSpPr>
         <p:spPr>
           <a:xfrm>
-            <a:off x="5054760" y="2756880"/>
+            <a:off x="5054760" y="2601720"/>
             <a:ext cx="105120" cy="0"/>
           </a:xfrm>
           <a:prstGeom prst="line">
@@ -1972,7 +1972,7 @@
         </p:nvSpPr>
         <p:spPr>
           <a:xfrm>
-            <a:off x="2004120" y="1697400"/>
+            <a:off x="2004120" y="1468440"/>
             <a:ext cx="105120" cy="0"/>
           </a:xfrm>
           <a:prstGeom prst="line">
@@ -2015,8 +2015,8 @@
         </p:nvSpPr>
         <p:spPr>
           <a:xfrm>
-            <a:off x="2056680" y="1697400"/>
-            <a:ext cx="0" cy="644760"/>
+            <a:off x="2056680" y="1468440"/>
+            <a:ext cx="0" cy="710280"/>
           </a:xfrm>
           <a:prstGeom prst="line">
             <a:avLst/>
@@ -2058,7 +2058,7 @@
         </p:nvSpPr>
         <p:spPr>
           <a:xfrm>
-            <a:off x="2004120" y="2342160"/>
+            <a:off x="2004120" y="2178720"/>
             <a:ext cx="105120" cy="0"/>
           </a:xfrm>
           <a:prstGeom prst="line">
@@ -2101,7 +2101,7 @@
         </p:nvSpPr>
         <p:spPr>
           <a:xfrm>
-            <a:off x="3757320" y="1275480"/>
+            <a:off x="3757320" y="1572480"/>
             <a:ext cx="105120" cy="0"/>
           </a:xfrm>
           <a:prstGeom prst="line">
@@ -2144,8 +2144,8 @@
         </p:nvSpPr>
         <p:spPr>
           <a:xfrm>
-            <a:off x="3809880" y="1275480"/>
-            <a:ext cx="0" cy="1000440"/>
+            <a:off x="3809880" y="1572480"/>
+            <a:ext cx="0" cy="707040"/>
           </a:xfrm>
           <a:prstGeom prst="line">
             <a:avLst/>
@@ -2187,7 +2187,7 @@
         </p:nvSpPr>
         <p:spPr>
           <a:xfrm>
-            <a:off x="3757320" y="2275920"/>
+            <a:off x="3757320" y="2279520"/>
             <a:ext cx="105120" cy="0"/>
           </a:xfrm>
           <a:prstGeom prst="line">
@@ -2230,7 +2230,7 @@
         </p:nvSpPr>
         <p:spPr>
           <a:xfrm>
-            <a:off x="5510520" y="2251080"/>
+            <a:off x="5510520" y="2271600"/>
             <a:ext cx="105120" cy="0"/>
           </a:xfrm>
           <a:prstGeom prst="line">
@@ -2273,8 +2273,8 @@
         </p:nvSpPr>
         <p:spPr>
           <a:xfrm>
-            <a:off x="5563080" y="2251080"/>
-            <a:ext cx="0" cy="440640"/>
+            <a:off x="5563080" y="2271600"/>
+            <a:ext cx="0" cy="489600"/>
           </a:xfrm>
           <a:prstGeom prst="line">
             <a:avLst/>
@@ -2316,7 +2316,7 @@
         </p:nvSpPr>
         <p:spPr>
           <a:xfrm>
-            <a:off x="5510520" y="2691720"/>
+            <a:off x="5510520" y="2761200"/>
             <a:ext cx="105120" cy="0"/>
           </a:xfrm>
           <a:prstGeom prst="line">
@@ -2359,7 +2359,7 @@
         </p:nvSpPr>
         <p:spPr>
           <a:xfrm>
-            <a:off x="549000" y="2712600"/>
+            <a:off x="549000" y="2703960"/>
             <a:ext cx="7363440" cy="0"/>
           </a:xfrm>
           <a:prstGeom prst="line">
@@ -2448,7 +2448,7 @@
         </p:nvSpPr>
         <p:spPr>
           <a:xfrm>
-            <a:off x="6860520" y="2563560"/>
+            <a:off x="6860520" y="2552400"/>
             <a:ext cx="715320" cy="87120"/>
           </a:xfrm>
           <a:prstGeom prst="rect">
@@ -2544,7 +2544,7 @@
         </p:nvSpPr>
         <p:spPr>
           <a:xfrm>
-            <a:off x="269280" y="2523600"/>
+            <a:off x="269280" y="2511720"/>
             <a:ext cx="229680" cy="91800"/>
           </a:xfrm>
           <a:prstGeom prst="rect">
@@ -2592,7 +2592,7 @@
         </p:nvSpPr>
         <p:spPr>
           <a:xfrm>
-            <a:off x="269280" y="1946520"/>
+            <a:off x="269280" y="1922400"/>
             <a:ext cx="229680" cy="91800"/>
           </a:xfrm>
           <a:prstGeom prst="rect">
@@ -2640,7 +2640,7 @@
         </p:nvSpPr>
         <p:spPr>
           <a:xfrm>
-            <a:off x="269280" y="1369440"/>
+            <a:off x="269280" y="1333080"/>
             <a:ext cx="229680" cy="91800"/>
           </a:xfrm>
           <a:prstGeom prst="rect">
@@ -2731,7 +2731,7 @@
         </p:nvSpPr>
         <p:spPr>
           <a:xfrm>
-            <a:off x="520560" y="2561400"/>
+            <a:off x="520560" y="2549520"/>
             <a:ext cx="28440" cy="0"/>
           </a:xfrm>
           <a:prstGeom prst="line">
@@ -2774,7 +2774,7 @@
         </p:nvSpPr>
         <p:spPr>
           <a:xfrm>
-            <a:off x="520560" y="1984320"/>
+            <a:off x="520560" y="1960200"/>
             <a:ext cx="28440" cy="0"/>
           </a:xfrm>
           <a:prstGeom prst="line">
@@ -2817,7 +2817,7 @@
         </p:nvSpPr>
         <p:spPr>
           <a:xfrm>
-            <a:off x="520560" y="1407240"/>
+            <a:off x="520560" y="1371240"/>
             <a:ext cx="28440" cy="0"/>
           </a:xfrm>
           <a:prstGeom prst="line">
@@ -2860,7 +2860,7 @@
         </p:nvSpPr>
         <p:spPr>
           <a:xfrm>
-            <a:off x="520560" y="830160"/>
+            <a:off x="520560" y="781920"/>
             <a:ext cx="28440" cy="0"/>
           </a:xfrm>
           <a:prstGeom prst="line">
@@ -3118,7 +3118,7 @@
         </p:nvSpPr>
         <p:spPr>
           <a:xfrm>
-            <a:off x="269280" y="792360"/>
+            <a:off x="269280" y="744120"/>
             <a:ext cx="229680" cy="91800"/>
           </a:xfrm>
           <a:prstGeom prst="rect">
